--- a/exports/pptx/lessons/middle-module-12-movement-of-sun/day-05-rashis.pptx
+++ b/exports/pptx/lessons/middle-module-12-movement-of-sun/day-05-rashis.pptx
@@ -5583,7 +5583,1125 @@
         </p:nvSpPr>
         <p:spPr>
           <a:xfrm>
-            <a:off x="406301" y="5378946"/>
+            <a:off x="406301" y="1843385"/>
+            <a:ext cx="8498026" cy="213271"/>
+          </a:xfrm>
+          <a:prstGeom prst="rect">
+            <a:avLst/>
+          </a:prstGeom>
+          <a:noFill/>
+          <a:ln/>
+        </p:spPr>
+        <p:txBody>
+          <a:bodyPr wrap="square" lIns="0" tIns="0" rIns="0" bIns="0" rtlCol="0" anchor="t"/>
+          <a:lstStyle/>
+          <a:p>
+            <a:pPr algn="l" indent="0" marL="0">
+              <a:lnSpc>
+                <a:spcPts val="1680"/>
+              </a:lnSpc>
+              <a:spcBef>
+                <a:spcPts val="300"/>
+              </a:spcBef>
+              <a:spcAft>
+                <a:spcPts val="300"/>
+              </a:spcAft>
+              <a:buNone/>
+            </a:pPr>
+            <a:r>
+              <a:rPr lang="en-US" sz="1200" i="1" dirty="0">
+                <a:solidFill>
+                  <a:srgbClr val="1C2833"/>
+                </a:solidFill>
+                <a:latin typeface="Arial" pitchFamily="34" charset="0"/>
+                <a:ea typeface="Arial" pitchFamily="34" charset="-122"/>
+                <a:cs typeface="Arial" pitchFamily="34" charset="-120"/>
+              </a:rPr>
+              <a:t>Each row: # · Sanskrit (IAST) · Greek/Latin/English · What the symbol depicts.</a:t>
+            </a:r>
+            <a:endParaRPr lang="en-US" sz="1200" dirty="0"/>
+          </a:p>
+        </p:txBody>
+      </p:sp>
+      <p:sp>
+        <p:nvSpPr>
+          <p:cNvPr id="7" name="Text 5"/>
+          <p:cNvSpPr/>
+          <p:nvPr/>
+        </p:nvSpPr>
+        <p:spPr>
+          <a:xfrm>
+            <a:off x="634901" y="2145506"/>
+            <a:ext cx="8102798" cy="2963466"/>
+          </a:xfrm>
+          <a:prstGeom prst="rect">
+            <a:avLst/>
+          </a:prstGeom>
+          <a:noFill/>
+          <a:ln/>
+        </p:spPr>
+        <p:txBody>
+          <a:bodyPr wrap="square" lIns="0" tIns="0" rIns="0" bIns="0" rtlCol="0" anchor="t"/>
+          <a:lstStyle/>
+          <a:p>
+            <a:pPr algn="l" marL="342900" indent="-342900">
+              <a:lnSpc>
+                <a:spcPts val="1620"/>
+              </a:lnSpc>
+              <a:spcAft>
+                <a:spcPts val="300"/>
+              </a:spcAft>
+              <a:buSzPct val="100000"/>
+              <a:buChar char="•"/>
+            </a:pPr>
+            <a:r>
+              <a:rPr lang="en-US" sz="1200" b="1" dirty="0">
+                <a:solidFill>
+                  <a:srgbClr val="1C2833"/>
+                </a:solidFill>
+                <a:latin typeface="Arial" pitchFamily="34" charset="0"/>
+                <a:ea typeface="Arial" pitchFamily="34" charset="-122"/>
+                <a:cs typeface="Arial" pitchFamily="34" charset="-120"/>
+              </a:rPr>
+              <a:t>1</a:t>
+            </a:r>
+            <a:pPr algn="l" indent="0" marL="0">
+              <a:lnSpc>
+                <a:spcPts val="1620"/>
+              </a:lnSpc>
+              <a:spcAft>
+                <a:spcPts val="300"/>
+              </a:spcAft>
+              <a:buNone/>
+            </a:pPr>
+            <a:r>
+              <a:rPr lang="en-US" sz="1200" dirty="0">
+                <a:solidFill>
+                  <a:srgbClr val="1C2833"/>
+                </a:solidFill>
+                <a:latin typeface="Arial" pitchFamily="34" charset="0"/>
+                <a:ea typeface="Arial" pitchFamily="34" charset="-122"/>
+                <a:cs typeface="Arial" pitchFamily="34" charset="-120"/>
+              </a:rPr>
+              <a:t> — </a:t>
+            </a:r>
+            <a:pPr algn="l" indent="0" marL="0">
+              <a:lnSpc>
+                <a:spcPts val="1620"/>
+              </a:lnSpc>
+              <a:spcAft>
+                <a:spcPts val="300"/>
+              </a:spcAft>
+              <a:buNone/>
+            </a:pPr>
+            <a:r>
+              <a:rPr lang="en-US" sz="1200" i="1" dirty="0">
+                <a:solidFill>
+                  <a:srgbClr val="1C2833"/>
+                </a:solidFill>
+                <a:latin typeface="Arial" pitchFamily="34" charset="0"/>
+                <a:ea typeface="Arial" pitchFamily="34" charset="-122"/>
+                <a:cs typeface="Arial" pitchFamily="34" charset="-120"/>
+              </a:rPr>
+              <a:t>Meṣa</a:t>
+            </a:r>
+            <a:pPr algn="l" indent="0" marL="0">
+              <a:lnSpc>
+                <a:spcPts val="1620"/>
+              </a:lnSpc>
+              <a:spcAft>
+                <a:spcPts val="300"/>
+              </a:spcAft>
+              <a:buNone/>
+            </a:pPr>
+            <a:r>
+              <a:rPr lang="en-US" sz="1200" dirty="0">
+                <a:solidFill>
+                  <a:srgbClr val="1C2833"/>
+                </a:solidFill>
+                <a:latin typeface="Arial" pitchFamily="34" charset="0"/>
+                <a:ea typeface="Arial" pitchFamily="34" charset="-122"/>
+                <a:cs typeface="Arial" pitchFamily="34" charset="-120"/>
+              </a:rPr>
+              <a:t> · Aries · Ram</a:t>
+            </a:r>
+            <a:endParaRPr lang="en-US" sz="1200" dirty="0"/>
+          </a:p>
+          <a:p>
+            <a:pPr algn="l" marL="342900" indent="-342900">
+              <a:lnSpc>
+                <a:spcPts val="1620"/>
+              </a:lnSpc>
+              <a:spcAft>
+                <a:spcPts val="300"/>
+              </a:spcAft>
+              <a:buSzPct val="100000"/>
+              <a:buChar char="•"/>
+            </a:pPr>
+            <a:r>
+              <a:rPr lang="en-US" sz="1200" b="1" dirty="0">
+                <a:solidFill>
+                  <a:srgbClr val="1C2833"/>
+                </a:solidFill>
+                <a:latin typeface="Arial" pitchFamily="34" charset="0"/>
+                <a:ea typeface="Arial" pitchFamily="34" charset="-122"/>
+                <a:cs typeface="Arial" pitchFamily="34" charset="-120"/>
+              </a:rPr>
+              <a:t>2</a:t>
+            </a:r>
+            <a:pPr algn="l" indent="0" marL="0">
+              <a:lnSpc>
+                <a:spcPts val="1620"/>
+              </a:lnSpc>
+              <a:spcAft>
+                <a:spcPts val="300"/>
+              </a:spcAft>
+              <a:buNone/>
+            </a:pPr>
+            <a:r>
+              <a:rPr lang="en-US" sz="1200" dirty="0">
+                <a:solidFill>
+                  <a:srgbClr val="1C2833"/>
+                </a:solidFill>
+                <a:latin typeface="Arial" pitchFamily="34" charset="0"/>
+                <a:ea typeface="Arial" pitchFamily="34" charset="-122"/>
+                <a:cs typeface="Arial" pitchFamily="34" charset="-120"/>
+              </a:rPr>
+              <a:t> — </a:t>
+            </a:r>
+            <a:pPr algn="l" indent="0" marL="0">
+              <a:lnSpc>
+                <a:spcPts val="1620"/>
+              </a:lnSpc>
+              <a:spcAft>
+                <a:spcPts val="300"/>
+              </a:spcAft>
+              <a:buNone/>
+            </a:pPr>
+            <a:r>
+              <a:rPr lang="en-US" sz="1200" i="1" dirty="0">
+                <a:solidFill>
+                  <a:srgbClr val="1C2833"/>
+                </a:solidFill>
+                <a:latin typeface="Arial" pitchFamily="34" charset="0"/>
+                <a:ea typeface="Arial" pitchFamily="34" charset="-122"/>
+                <a:cs typeface="Arial" pitchFamily="34" charset="-120"/>
+              </a:rPr>
+              <a:t>Vṛṣabha</a:t>
+            </a:r>
+            <a:pPr algn="l" indent="0" marL="0">
+              <a:lnSpc>
+                <a:spcPts val="1620"/>
+              </a:lnSpc>
+              <a:spcAft>
+                <a:spcPts val="300"/>
+              </a:spcAft>
+              <a:buNone/>
+            </a:pPr>
+            <a:r>
+              <a:rPr lang="en-US" sz="1200" dirty="0">
+                <a:solidFill>
+                  <a:srgbClr val="1C2833"/>
+                </a:solidFill>
+                <a:latin typeface="Arial" pitchFamily="34" charset="0"/>
+                <a:ea typeface="Arial" pitchFamily="34" charset="-122"/>
+                <a:cs typeface="Arial" pitchFamily="34" charset="-120"/>
+              </a:rPr>
+              <a:t> · Taurus · Bull</a:t>
+            </a:r>
+            <a:endParaRPr lang="en-US" sz="1200" dirty="0"/>
+          </a:p>
+          <a:p>
+            <a:pPr algn="l" marL="342900" indent="-342900">
+              <a:lnSpc>
+                <a:spcPts val="1620"/>
+              </a:lnSpc>
+              <a:spcAft>
+                <a:spcPts val="300"/>
+              </a:spcAft>
+              <a:buSzPct val="100000"/>
+              <a:buChar char="•"/>
+            </a:pPr>
+            <a:r>
+              <a:rPr lang="en-US" sz="1200" b="1" dirty="0">
+                <a:solidFill>
+                  <a:srgbClr val="1C2833"/>
+                </a:solidFill>
+                <a:latin typeface="Arial" pitchFamily="34" charset="0"/>
+                <a:ea typeface="Arial" pitchFamily="34" charset="-122"/>
+                <a:cs typeface="Arial" pitchFamily="34" charset="-120"/>
+              </a:rPr>
+              <a:t>3</a:t>
+            </a:r>
+            <a:pPr algn="l" indent="0" marL="0">
+              <a:lnSpc>
+                <a:spcPts val="1620"/>
+              </a:lnSpc>
+              <a:spcAft>
+                <a:spcPts val="300"/>
+              </a:spcAft>
+              <a:buNone/>
+            </a:pPr>
+            <a:r>
+              <a:rPr lang="en-US" sz="1200" dirty="0">
+                <a:solidFill>
+                  <a:srgbClr val="1C2833"/>
+                </a:solidFill>
+                <a:latin typeface="Arial" pitchFamily="34" charset="0"/>
+                <a:ea typeface="Arial" pitchFamily="34" charset="-122"/>
+                <a:cs typeface="Arial" pitchFamily="34" charset="-120"/>
+              </a:rPr>
+              <a:t> — </a:t>
+            </a:r>
+            <a:pPr algn="l" indent="0" marL="0">
+              <a:lnSpc>
+                <a:spcPts val="1620"/>
+              </a:lnSpc>
+              <a:spcAft>
+                <a:spcPts val="300"/>
+              </a:spcAft>
+              <a:buNone/>
+            </a:pPr>
+            <a:r>
+              <a:rPr lang="en-US" sz="1200" i="1" dirty="0">
+                <a:solidFill>
+                  <a:srgbClr val="1C2833"/>
+                </a:solidFill>
+                <a:latin typeface="Arial" pitchFamily="34" charset="0"/>
+                <a:ea typeface="Arial" pitchFamily="34" charset="-122"/>
+                <a:cs typeface="Arial" pitchFamily="34" charset="-120"/>
+              </a:rPr>
+              <a:t>Mithuna</a:t>
+            </a:r>
+            <a:pPr algn="l" indent="0" marL="0">
+              <a:lnSpc>
+                <a:spcPts val="1620"/>
+              </a:lnSpc>
+              <a:spcAft>
+                <a:spcPts val="300"/>
+              </a:spcAft>
+              <a:buNone/>
+            </a:pPr>
+            <a:r>
+              <a:rPr lang="en-US" sz="1200" dirty="0">
+                <a:solidFill>
+                  <a:srgbClr val="1C2833"/>
+                </a:solidFill>
+                <a:latin typeface="Arial" pitchFamily="34" charset="0"/>
+                <a:ea typeface="Arial" pitchFamily="34" charset="-122"/>
+                <a:cs typeface="Arial" pitchFamily="34" charset="-120"/>
+              </a:rPr>
+              <a:t> · Gemini · Twins</a:t>
+            </a:r>
+            <a:endParaRPr lang="en-US" sz="1200" dirty="0"/>
+          </a:p>
+          <a:p>
+            <a:pPr algn="l" marL="342900" indent="-342900">
+              <a:lnSpc>
+                <a:spcPts val="1620"/>
+              </a:lnSpc>
+              <a:spcAft>
+                <a:spcPts val="300"/>
+              </a:spcAft>
+              <a:buSzPct val="100000"/>
+              <a:buChar char="•"/>
+            </a:pPr>
+            <a:r>
+              <a:rPr lang="en-US" sz="1200" b="1" dirty="0">
+                <a:solidFill>
+                  <a:srgbClr val="1C2833"/>
+                </a:solidFill>
+                <a:latin typeface="Arial" pitchFamily="34" charset="0"/>
+                <a:ea typeface="Arial" pitchFamily="34" charset="-122"/>
+                <a:cs typeface="Arial" pitchFamily="34" charset="-120"/>
+              </a:rPr>
+              <a:t>4</a:t>
+            </a:r>
+            <a:pPr algn="l" indent="0" marL="0">
+              <a:lnSpc>
+                <a:spcPts val="1620"/>
+              </a:lnSpc>
+              <a:spcAft>
+                <a:spcPts val="300"/>
+              </a:spcAft>
+              <a:buNone/>
+            </a:pPr>
+            <a:r>
+              <a:rPr lang="en-US" sz="1200" dirty="0">
+                <a:solidFill>
+                  <a:srgbClr val="1C2833"/>
+                </a:solidFill>
+                <a:latin typeface="Arial" pitchFamily="34" charset="0"/>
+                <a:ea typeface="Arial" pitchFamily="34" charset="-122"/>
+                <a:cs typeface="Arial" pitchFamily="34" charset="-120"/>
+              </a:rPr>
+              <a:t> — </a:t>
+            </a:r>
+            <a:pPr algn="l" indent="0" marL="0">
+              <a:lnSpc>
+                <a:spcPts val="1620"/>
+              </a:lnSpc>
+              <a:spcAft>
+                <a:spcPts val="300"/>
+              </a:spcAft>
+              <a:buNone/>
+            </a:pPr>
+            <a:r>
+              <a:rPr lang="en-US" sz="1200" i="1" dirty="0">
+                <a:solidFill>
+                  <a:srgbClr val="1C2833"/>
+                </a:solidFill>
+                <a:latin typeface="Arial" pitchFamily="34" charset="0"/>
+                <a:ea typeface="Arial" pitchFamily="34" charset="-122"/>
+                <a:cs typeface="Arial" pitchFamily="34" charset="-120"/>
+              </a:rPr>
+              <a:t>Karka</a:t>
+            </a:r>
+            <a:pPr algn="l" indent="0" marL="0">
+              <a:lnSpc>
+                <a:spcPts val="1620"/>
+              </a:lnSpc>
+              <a:spcAft>
+                <a:spcPts val="300"/>
+              </a:spcAft>
+              <a:buNone/>
+            </a:pPr>
+            <a:r>
+              <a:rPr lang="en-US" sz="1200" dirty="0">
+                <a:solidFill>
+                  <a:srgbClr val="1C2833"/>
+                </a:solidFill>
+                <a:latin typeface="Arial" pitchFamily="34" charset="0"/>
+                <a:ea typeface="Arial" pitchFamily="34" charset="-122"/>
+                <a:cs typeface="Arial" pitchFamily="34" charset="-120"/>
+              </a:rPr>
+              <a:t> / </a:t>
+            </a:r>
+            <a:pPr algn="l" indent="0" marL="0">
+              <a:lnSpc>
+                <a:spcPts val="1620"/>
+              </a:lnSpc>
+              <a:spcAft>
+                <a:spcPts val="300"/>
+              </a:spcAft>
+              <a:buNone/>
+            </a:pPr>
+            <a:r>
+              <a:rPr lang="en-US" sz="1200" i="1" dirty="0">
+                <a:solidFill>
+                  <a:srgbClr val="1C2833"/>
+                </a:solidFill>
+                <a:latin typeface="Arial" pitchFamily="34" charset="0"/>
+                <a:ea typeface="Arial" pitchFamily="34" charset="-122"/>
+                <a:cs typeface="Arial" pitchFamily="34" charset="-120"/>
+              </a:rPr>
+              <a:t>Karkaṭa</a:t>
+            </a:r>
+            <a:pPr algn="l" indent="0" marL="0">
+              <a:lnSpc>
+                <a:spcPts val="1620"/>
+              </a:lnSpc>
+              <a:spcAft>
+                <a:spcPts val="300"/>
+              </a:spcAft>
+              <a:buNone/>
+            </a:pPr>
+            <a:r>
+              <a:rPr lang="en-US" sz="1200" dirty="0">
+                <a:solidFill>
+                  <a:srgbClr val="1C2833"/>
+                </a:solidFill>
+                <a:latin typeface="Arial" pitchFamily="34" charset="0"/>
+                <a:ea typeface="Arial" pitchFamily="34" charset="-122"/>
+                <a:cs typeface="Arial" pitchFamily="34" charset="-120"/>
+              </a:rPr>
+              <a:t> · Cancer · Crab</a:t>
+            </a:r>
+            <a:endParaRPr lang="en-US" sz="1200" dirty="0"/>
+          </a:p>
+          <a:p>
+            <a:pPr algn="l" marL="342900" indent="-342900">
+              <a:lnSpc>
+                <a:spcPts val="1620"/>
+              </a:lnSpc>
+              <a:spcAft>
+                <a:spcPts val="300"/>
+              </a:spcAft>
+              <a:buSzPct val="100000"/>
+              <a:buChar char="•"/>
+            </a:pPr>
+            <a:r>
+              <a:rPr lang="en-US" sz="1200" b="1" dirty="0">
+                <a:solidFill>
+                  <a:srgbClr val="1C2833"/>
+                </a:solidFill>
+                <a:latin typeface="Arial" pitchFamily="34" charset="0"/>
+                <a:ea typeface="Arial" pitchFamily="34" charset="-122"/>
+                <a:cs typeface="Arial" pitchFamily="34" charset="-120"/>
+              </a:rPr>
+              <a:t>5</a:t>
+            </a:r>
+            <a:pPr algn="l" indent="0" marL="0">
+              <a:lnSpc>
+                <a:spcPts val="1620"/>
+              </a:lnSpc>
+              <a:spcAft>
+                <a:spcPts val="300"/>
+              </a:spcAft>
+              <a:buNone/>
+            </a:pPr>
+            <a:r>
+              <a:rPr lang="en-US" sz="1200" dirty="0">
+                <a:solidFill>
+                  <a:srgbClr val="1C2833"/>
+                </a:solidFill>
+                <a:latin typeface="Arial" pitchFamily="34" charset="0"/>
+                <a:ea typeface="Arial" pitchFamily="34" charset="-122"/>
+                <a:cs typeface="Arial" pitchFamily="34" charset="-120"/>
+              </a:rPr>
+              <a:t> — </a:t>
+            </a:r>
+            <a:pPr algn="l" indent="0" marL="0">
+              <a:lnSpc>
+                <a:spcPts val="1620"/>
+              </a:lnSpc>
+              <a:spcAft>
+                <a:spcPts val="300"/>
+              </a:spcAft>
+              <a:buNone/>
+            </a:pPr>
+            <a:r>
+              <a:rPr lang="en-US" sz="1200" i="1" dirty="0">
+                <a:solidFill>
+                  <a:srgbClr val="1C2833"/>
+                </a:solidFill>
+                <a:latin typeface="Arial" pitchFamily="34" charset="0"/>
+                <a:ea typeface="Arial" pitchFamily="34" charset="-122"/>
+                <a:cs typeface="Arial" pitchFamily="34" charset="-120"/>
+              </a:rPr>
+              <a:t>Siṁha</a:t>
+            </a:r>
+            <a:pPr algn="l" indent="0" marL="0">
+              <a:lnSpc>
+                <a:spcPts val="1620"/>
+              </a:lnSpc>
+              <a:spcAft>
+                <a:spcPts val="300"/>
+              </a:spcAft>
+              <a:buNone/>
+            </a:pPr>
+            <a:r>
+              <a:rPr lang="en-US" sz="1200" dirty="0">
+                <a:solidFill>
+                  <a:srgbClr val="1C2833"/>
+                </a:solidFill>
+                <a:latin typeface="Arial" pitchFamily="34" charset="0"/>
+                <a:ea typeface="Arial" pitchFamily="34" charset="-122"/>
+                <a:cs typeface="Arial" pitchFamily="34" charset="-120"/>
+              </a:rPr>
+              <a:t> · Leo · Lion</a:t>
+            </a:r>
+            <a:endParaRPr lang="en-US" sz="1200" dirty="0"/>
+          </a:p>
+          <a:p>
+            <a:pPr algn="l" marL="342900" indent="-342900">
+              <a:lnSpc>
+                <a:spcPts val="1620"/>
+              </a:lnSpc>
+              <a:spcAft>
+                <a:spcPts val="300"/>
+              </a:spcAft>
+              <a:buSzPct val="100000"/>
+              <a:buChar char="•"/>
+            </a:pPr>
+            <a:r>
+              <a:rPr lang="en-US" sz="1200" b="1" dirty="0">
+                <a:solidFill>
+                  <a:srgbClr val="1C2833"/>
+                </a:solidFill>
+                <a:latin typeface="Arial" pitchFamily="34" charset="0"/>
+                <a:ea typeface="Arial" pitchFamily="34" charset="-122"/>
+                <a:cs typeface="Arial" pitchFamily="34" charset="-120"/>
+              </a:rPr>
+              <a:t>6</a:t>
+            </a:r>
+            <a:pPr algn="l" indent="0" marL="0">
+              <a:lnSpc>
+                <a:spcPts val="1620"/>
+              </a:lnSpc>
+              <a:spcAft>
+                <a:spcPts val="300"/>
+              </a:spcAft>
+              <a:buNone/>
+            </a:pPr>
+            <a:r>
+              <a:rPr lang="en-US" sz="1200" dirty="0">
+                <a:solidFill>
+                  <a:srgbClr val="1C2833"/>
+                </a:solidFill>
+                <a:latin typeface="Arial" pitchFamily="34" charset="0"/>
+                <a:ea typeface="Arial" pitchFamily="34" charset="-122"/>
+                <a:cs typeface="Arial" pitchFamily="34" charset="-120"/>
+              </a:rPr>
+              <a:t> — </a:t>
+            </a:r>
+            <a:pPr algn="l" indent="0" marL="0">
+              <a:lnSpc>
+                <a:spcPts val="1620"/>
+              </a:lnSpc>
+              <a:spcAft>
+                <a:spcPts val="300"/>
+              </a:spcAft>
+              <a:buNone/>
+            </a:pPr>
+            <a:r>
+              <a:rPr lang="en-US" sz="1200" i="1" dirty="0">
+                <a:solidFill>
+                  <a:srgbClr val="1C2833"/>
+                </a:solidFill>
+                <a:latin typeface="Arial" pitchFamily="34" charset="0"/>
+                <a:ea typeface="Arial" pitchFamily="34" charset="-122"/>
+                <a:cs typeface="Arial" pitchFamily="34" charset="-120"/>
+              </a:rPr>
+              <a:t>Kanyā</a:t>
+            </a:r>
+            <a:pPr algn="l" indent="0" marL="0">
+              <a:lnSpc>
+                <a:spcPts val="1620"/>
+              </a:lnSpc>
+              <a:spcAft>
+                <a:spcPts val="300"/>
+              </a:spcAft>
+              <a:buNone/>
+            </a:pPr>
+            <a:r>
+              <a:rPr lang="en-US" sz="1200" dirty="0">
+                <a:solidFill>
+                  <a:srgbClr val="1C2833"/>
+                </a:solidFill>
+                <a:latin typeface="Arial" pitchFamily="34" charset="0"/>
+                <a:ea typeface="Arial" pitchFamily="34" charset="-122"/>
+                <a:cs typeface="Arial" pitchFamily="34" charset="-120"/>
+              </a:rPr>
+              <a:t> · Virgo · Maiden</a:t>
+            </a:r>
+            <a:endParaRPr lang="en-US" sz="1200" dirty="0"/>
+          </a:p>
+          <a:p>
+            <a:pPr algn="l" marL="342900" indent="-342900">
+              <a:lnSpc>
+                <a:spcPts val="1620"/>
+              </a:lnSpc>
+              <a:spcAft>
+                <a:spcPts val="300"/>
+              </a:spcAft>
+              <a:buSzPct val="100000"/>
+              <a:buChar char="•"/>
+            </a:pPr>
+            <a:r>
+              <a:rPr lang="en-US" sz="1200" b="1" dirty="0">
+                <a:solidFill>
+                  <a:srgbClr val="1C2833"/>
+                </a:solidFill>
+                <a:latin typeface="Arial" pitchFamily="34" charset="0"/>
+                <a:ea typeface="Arial" pitchFamily="34" charset="-122"/>
+                <a:cs typeface="Arial" pitchFamily="34" charset="-120"/>
+              </a:rPr>
+              <a:t>7</a:t>
+            </a:r>
+            <a:pPr algn="l" indent="0" marL="0">
+              <a:lnSpc>
+                <a:spcPts val="1620"/>
+              </a:lnSpc>
+              <a:spcAft>
+                <a:spcPts val="300"/>
+              </a:spcAft>
+              <a:buNone/>
+            </a:pPr>
+            <a:r>
+              <a:rPr lang="en-US" sz="1200" dirty="0">
+                <a:solidFill>
+                  <a:srgbClr val="1C2833"/>
+                </a:solidFill>
+                <a:latin typeface="Arial" pitchFamily="34" charset="0"/>
+                <a:ea typeface="Arial" pitchFamily="34" charset="-122"/>
+                <a:cs typeface="Arial" pitchFamily="34" charset="-120"/>
+              </a:rPr>
+              <a:t> — </a:t>
+            </a:r>
+            <a:pPr algn="l" indent="0" marL="0">
+              <a:lnSpc>
+                <a:spcPts val="1620"/>
+              </a:lnSpc>
+              <a:spcAft>
+                <a:spcPts val="300"/>
+              </a:spcAft>
+              <a:buNone/>
+            </a:pPr>
+            <a:r>
+              <a:rPr lang="en-US" sz="1200" i="1" dirty="0">
+                <a:solidFill>
+                  <a:srgbClr val="1C2833"/>
+                </a:solidFill>
+                <a:latin typeface="Arial" pitchFamily="34" charset="0"/>
+                <a:ea typeface="Arial" pitchFamily="34" charset="-122"/>
+                <a:cs typeface="Arial" pitchFamily="34" charset="-120"/>
+              </a:rPr>
+              <a:t>Tulā</a:t>
+            </a:r>
+            <a:pPr algn="l" indent="0" marL="0">
+              <a:lnSpc>
+                <a:spcPts val="1620"/>
+              </a:lnSpc>
+              <a:spcAft>
+                <a:spcPts val="300"/>
+              </a:spcAft>
+              <a:buNone/>
+            </a:pPr>
+            <a:r>
+              <a:rPr lang="en-US" sz="1200" dirty="0">
+                <a:solidFill>
+                  <a:srgbClr val="1C2833"/>
+                </a:solidFill>
+                <a:latin typeface="Arial" pitchFamily="34" charset="0"/>
+                <a:ea typeface="Arial" pitchFamily="34" charset="-122"/>
+                <a:cs typeface="Arial" pitchFamily="34" charset="-120"/>
+              </a:rPr>
+              <a:t> · Libra · Scales</a:t>
+            </a:r>
+            <a:endParaRPr lang="en-US" sz="1200" dirty="0"/>
+          </a:p>
+          <a:p>
+            <a:pPr algn="l" marL="342900" indent="-342900">
+              <a:lnSpc>
+                <a:spcPts val="1620"/>
+              </a:lnSpc>
+              <a:spcAft>
+                <a:spcPts val="300"/>
+              </a:spcAft>
+              <a:buSzPct val="100000"/>
+              <a:buChar char="•"/>
+            </a:pPr>
+            <a:r>
+              <a:rPr lang="en-US" sz="1200" b="1" dirty="0">
+                <a:solidFill>
+                  <a:srgbClr val="1C2833"/>
+                </a:solidFill>
+                <a:latin typeface="Arial" pitchFamily="34" charset="0"/>
+                <a:ea typeface="Arial" pitchFamily="34" charset="-122"/>
+                <a:cs typeface="Arial" pitchFamily="34" charset="-120"/>
+              </a:rPr>
+              <a:t>8</a:t>
+            </a:r>
+            <a:pPr algn="l" indent="0" marL="0">
+              <a:lnSpc>
+                <a:spcPts val="1620"/>
+              </a:lnSpc>
+              <a:spcAft>
+                <a:spcPts val="300"/>
+              </a:spcAft>
+              <a:buNone/>
+            </a:pPr>
+            <a:r>
+              <a:rPr lang="en-US" sz="1200" dirty="0">
+                <a:solidFill>
+                  <a:srgbClr val="1C2833"/>
+                </a:solidFill>
+                <a:latin typeface="Arial" pitchFamily="34" charset="0"/>
+                <a:ea typeface="Arial" pitchFamily="34" charset="-122"/>
+                <a:cs typeface="Arial" pitchFamily="34" charset="-120"/>
+              </a:rPr>
+              <a:t> — </a:t>
+            </a:r>
+            <a:pPr algn="l" indent="0" marL="0">
+              <a:lnSpc>
+                <a:spcPts val="1620"/>
+              </a:lnSpc>
+              <a:spcAft>
+                <a:spcPts val="300"/>
+              </a:spcAft>
+              <a:buNone/>
+            </a:pPr>
+            <a:r>
+              <a:rPr lang="en-US" sz="1200" i="1" dirty="0">
+                <a:solidFill>
+                  <a:srgbClr val="1C2833"/>
+                </a:solidFill>
+                <a:latin typeface="Arial" pitchFamily="34" charset="0"/>
+                <a:ea typeface="Arial" pitchFamily="34" charset="-122"/>
+                <a:cs typeface="Arial" pitchFamily="34" charset="-120"/>
+              </a:rPr>
+              <a:t>Vṛścika</a:t>
+            </a:r>
+            <a:pPr algn="l" indent="0" marL="0">
+              <a:lnSpc>
+                <a:spcPts val="1620"/>
+              </a:lnSpc>
+              <a:spcAft>
+                <a:spcPts val="300"/>
+              </a:spcAft>
+              <a:buNone/>
+            </a:pPr>
+            <a:r>
+              <a:rPr lang="en-US" sz="1200" dirty="0">
+                <a:solidFill>
+                  <a:srgbClr val="1C2833"/>
+                </a:solidFill>
+                <a:latin typeface="Arial" pitchFamily="34" charset="0"/>
+                <a:ea typeface="Arial" pitchFamily="34" charset="-122"/>
+                <a:cs typeface="Arial" pitchFamily="34" charset="-120"/>
+              </a:rPr>
+              <a:t> · Scorpio · Scorpion</a:t>
+            </a:r>
+            <a:endParaRPr lang="en-US" sz="1200" dirty="0"/>
+          </a:p>
+          <a:p>
+            <a:pPr algn="l" marL="342900" indent="-342900">
+              <a:lnSpc>
+                <a:spcPts val="1620"/>
+              </a:lnSpc>
+              <a:spcAft>
+                <a:spcPts val="300"/>
+              </a:spcAft>
+              <a:buSzPct val="100000"/>
+              <a:buChar char="•"/>
+            </a:pPr>
+            <a:r>
+              <a:rPr lang="en-US" sz="1200" b="1" dirty="0">
+                <a:solidFill>
+                  <a:srgbClr val="1C2833"/>
+                </a:solidFill>
+                <a:latin typeface="Arial" pitchFamily="34" charset="0"/>
+                <a:ea typeface="Arial" pitchFamily="34" charset="-122"/>
+                <a:cs typeface="Arial" pitchFamily="34" charset="-120"/>
+              </a:rPr>
+              <a:t>9</a:t>
+            </a:r>
+            <a:pPr algn="l" indent="0" marL="0">
+              <a:lnSpc>
+                <a:spcPts val="1620"/>
+              </a:lnSpc>
+              <a:spcAft>
+                <a:spcPts val="300"/>
+              </a:spcAft>
+              <a:buNone/>
+            </a:pPr>
+            <a:r>
+              <a:rPr lang="en-US" sz="1200" dirty="0">
+                <a:solidFill>
+                  <a:srgbClr val="1C2833"/>
+                </a:solidFill>
+                <a:latin typeface="Arial" pitchFamily="34" charset="0"/>
+                <a:ea typeface="Arial" pitchFamily="34" charset="-122"/>
+                <a:cs typeface="Arial" pitchFamily="34" charset="-120"/>
+              </a:rPr>
+              <a:t> — </a:t>
+            </a:r>
+            <a:pPr algn="l" indent="0" marL="0">
+              <a:lnSpc>
+                <a:spcPts val="1620"/>
+              </a:lnSpc>
+              <a:spcAft>
+                <a:spcPts val="300"/>
+              </a:spcAft>
+              <a:buNone/>
+            </a:pPr>
+            <a:r>
+              <a:rPr lang="en-US" sz="1200" i="1" dirty="0">
+                <a:solidFill>
+                  <a:srgbClr val="1C2833"/>
+                </a:solidFill>
+                <a:latin typeface="Arial" pitchFamily="34" charset="0"/>
+                <a:ea typeface="Arial" pitchFamily="34" charset="-122"/>
+                <a:cs typeface="Arial" pitchFamily="34" charset="-120"/>
+              </a:rPr>
+              <a:t>Dhanus</a:t>
+            </a:r>
+            <a:pPr algn="l" indent="0" marL="0">
+              <a:lnSpc>
+                <a:spcPts val="1620"/>
+              </a:lnSpc>
+              <a:spcAft>
+                <a:spcPts val="300"/>
+              </a:spcAft>
+              <a:buNone/>
+            </a:pPr>
+            <a:r>
+              <a:rPr lang="en-US" sz="1200" dirty="0">
+                <a:solidFill>
+                  <a:srgbClr val="1C2833"/>
+                </a:solidFill>
+                <a:latin typeface="Arial" pitchFamily="34" charset="0"/>
+                <a:ea typeface="Arial" pitchFamily="34" charset="-122"/>
+                <a:cs typeface="Arial" pitchFamily="34" charset="-120"/>
+              </a:rPr>
+              <a:t> · Sagittarius · Bow / Archer</a:t>
+            </a:r>
+            <a:endParaRPr lang="en-US" sz="1200" dirty="0"/>
+          </a:p>
+          <a:p>
+            <a:pPr algn="l" marL="342900" indent="-342900">
+              <a:lnSpc>
+                <a:spcPts val="1620"/>
+              </a:lnSpc>
+              <a:spcAft>
+                <a:spcPts val="300"/>
+              </a:spcAft>
+              <a:buSzPct val="100000"/>
+              <a:buChar char="•"/>
+            </a:pPr>
+            <a:r>
+              <a:rPr lang="en-US" sz="1200" b="1" dirty="0">
+                <a:solidFill>
+                  <a:srgbClr val="1C2833"/>
+                </a:solidFill>
+                <a:latin typeface="Arial" pitchFamily="34" charset="0"/>
+                <a:ea typeface="Arial" pitchFamily="34" charset="-122"/>
+                <a:cs typeface="Arial" pitchFamily="34" charset="-120"/>
+              </a:rPr>
+              <a:t>10</a:t>
+            </a:r>
+            <a:pPr algn="l" indent="0" marL="0">
+              <a:lnSpc>
+                <a:spcPts val="1620"/>
+              </a:lnSpc>
+              <a:spcAft>
+                <a:spcPts val="300"/>
+              </a:spcAft>
+              <a:buNone/>
+            </a:pPr>
+            <a:r>
+              <a:rPr lang="en-US" sz="1200" dirty="0">
+                <a:solidFill>
+                  <a:srgbClr val="1C2833"/>
+                </a:solidFill>
+                <a:latin typeface="Arial" pitchFamily="34" charset="0"/>
+                <a:ea typeface="Arial" pitchFamily="34" charset="-122"/>
+                <a:cs typeface="Arial" pitchFamily="34" charset="-120"/>
+              </a:rPr>
+              <a:t> — </a:t>
+            </a:r>
+            <a:pPr algn="l" indent="0" marL="0">
+              <a:lnSpc>
+                <a:spcPts val="1620"/>
+              </a:lnSpc>
+              <a:spcAft>
+                <a:spcPts val="300"/>
+              </a:spcAft>
+              <a:buNone/>
+            </a:pPr>
+            <a:r>
+              <a:rPr lang="en-US" sz="1200" i="1" dirty="0">
+                <a:solidFill>
+                  <a:srgbClr val="1C2833"/>
+                </a:solidFill>
+                <a:latin typeface="Arial" pitchFamily="34" charset="0"/>
+                <a:ea typeface="Arial" pitchFamily="34" charset="-122"/>
+                <a:cs typeface="Arial" pitchFamily="34" charset="-120"/>
+              </a:rPr>
+              <a:t>Makara</a:t>
+            </a:r>
+            <a:pPr algn="l" indent="0" marL="0">
+              <a:lnSpc>
+                <a:spcPts val="1620"/>
+              </a:lnSpc>
+              <a:spcAft>
+                <a:spcPts val="300"/>
+              </a:spcAft>
+              <a:buNone/>
+            </a:pPr>
+            <a:r>
+              <a:rPr lang="en-US" sz="1200" dirty="0">
+                <a:solidFill>
+                  <a:srgbClr val="1C2833"/>
+                </a:solidFill>
+                <a:latin typeface="Arial" pitchFamily="34" charset="0"/>
+                <a:ea typeface="Arial" pitchFamily="34" charset="-122"/>
+                <a:cs typeface="Arial" pitchFamily="34" charset="-120"/>
+              </a:rPr>
+              <a:t> · Capricorn · Sea-goat</a:t>
+            </a:r>
+            <a:endParaRPr lang="en-US" sz="1200" dirty="0"/>
+          </a:p>
+          <a:p>
+            <a:pPr algn="l" marL="342900" indent="-342900">
+              <a:lnSpc>
+                <a:spcPts val="1620"/>
+              </a:lnSpc>
+              <a:spcAft>
+                <a:spcPts val="300"/>
+              </a:spcAft>
+              <a:buSzPct val="100000"/>
+              <a:buChar char="•"/>
+            </a:pPr>
+            <a:r>
+              <a:rPr lang="en-US" sz="1200" b="1" dirty="0">
+                <a:solidFill>
+                  <a:srgbClr val="1C2833"/>
+                </a:solidFill>
+                <a:latin typeface="Arial" pitchFamily="34" charset="0"/>
+                <a:ea typeface="Arial" pitchFamily="34" charset="-122"/>
+                <a:cs typeface="Arial" pitchFamily="34" charset="-120"/>
+              </a:rPr>
+              <a:t>11</a:t>
+            </a:r>
+            <a:pPr algn="l" indent="0" marL="0">
+              <a:lnSpc>
+                <a:spcPts val="1620"/>
+              </a:lnSpc>
+              <a:spcAft>
+                <a:spcPts val="300"/>
+              </a:spcAft>
+              <a:buNone/>
+            </a:pPr>
+            <a:r>
+              <a:rPr lang="en-US" sz="1200" dirty="0">
+                <a:solidFill>
+                  <a:srgbClr val="1C2833"/>
+                </a:solidFill>
+                <a:latin typeface="Arial" pitchFamily="34" charset="0"/>
+                <a:ea typeface="Arial" pitchFamily="34" charset="-122"/>
+                <a:cs typeface="Arial" pitchFamily="34" charset="-120"/>
+              </a:rPr>
+              <a:t> — </a:t>
+            </a:r>
+            <a:pPr algn="l" indent="0" marL="0">
+              <a:lnSpc>
+                <a:spcPts val="1620"/>
+              </a:lnSpc>
+              <a:spcAft>
+                <a:spcPts val="300"/>
+              </a:spcAft>
+              <a:buNone/>
+            </a:pPr>
+            <a:r>
+              <a:rPr lang="en-US" sz="1200" i="1" dirty="0">
+                <a:solidFill>
+                  <a:srgbClr val="1C2833"/>
+                </a:solidFill>
+                <a:latin typeface="Arial" pitchFamily="34" charset="0"/>
+                <a:ea typeface="Arial" pitchFamily="34" charset="-122"/>
+                <a:cs typeface="Arial" pitchFamily="34" charset="-120"/>
+              </a:rPr>
+              <a:t>Kumbha</a:t>
+            </a:r>
+            <a:pPr algn="l" indent="0" marL="0">
+              <a:lnSpc>
+                <a:spcPts val="1620"/>
+              </a:lnSpc>
+              <a:spcAft>
+                <a:spcPts val="300"/>
+              </a:spcAft>
+              <a:buNone/>
+            </a:pPr>
+            <a:r>
+              <a:rPr lang="en-US" sz="1200" dirty="0">
+                <a:solidFill>
+                  <a:srgbClr val="1C2833"/>
+                </a:solidFill>
+                <a:latin typeface="Arial" pitchFamily="34" charset="0"/>
+                <a:ea typeface="Arial" pitchFamily="34" charset="-122"/>
+                <a:cs typeface="Arial" pitchFamily="34" charset="-120"/>
+              </a:rPr>
+              <a:t> · Aquarius · Water-pot</a:t>
+            </a:r>
+            <a:endParaRPr lang="en-US" sz="1200" dirty="0"/>
+          </a:p>
+          <a:p>
+            <a:pPr algn="l" marL="342900" indent="-342900">
+              <a:lnSpc>
+                <a:spcPts val="1620"/>
+              </a:lnSpc>
+              <a:spcAft>
+                <a:spcPts val="300"/>
+              </a:spcAft>
+              <a:buSzPct val="100000"/>
+              <a:buChar char="•"/>
+            </a:pPr>
+            <a:r>
+              <a:rPr lang="en-US" sz="1200" b="1" dirty="0">
+                <a:solidFill>
+                  <a:srgbClr val="1C2833"/>
+                </a:solidFill>
+                <a:latin typeface="Arial" pitchFamily="34" charset="0"/>
+                <a:ea typeface="Arial" pitchFamily="34" charset="-122"/>
+                <a:cs typeface="Arial" pitchFamily="34" charset="-120"/>
+              </a:rPr>
+              <a:t>12</a:t>
+            </a:r>
+            <a:pPr algn="l" indent="0" marL="0">
+              <a:lnSpc>
+                <a:spcPts val="1620"/>
+              </a:lnSpc>
+              <a:spcAft>
+                <a:spcPts val="300"/>
+              </a:spcAft>
+              <a:buNone/>
+            </a:pPr>
+            <a:r>
+              <a:rPr lang="en-US" sz="1200" dirty="0">
+                <a:solidFill>
+                  <a:srgbClr val="1C2833"/>
+                </a:solidFill>
+                <a:latin typeface="Arial" pitchFamily="34" charset="0"/>
+                <a:ea typeface="Arial" pitchFamily="34" charset="-122"/>
+                <a:cs typeface="Arial" pitchFamily="34" charset="-120"/>
+              </a:rPr>
+              <a:t> — </a:t>
+            </a:r>
+            <a:pPr algn="l" indent="0" marL="0">
+              <a:lnSpc>
+                <a:spcPts val="1620"/>
+              </a:lnSpc>
+              <a:spcAft>
+                <a:spcPts val="300"/>
+              </a:spcAft>
+              <a:buNone/>
+            </a:pPr>
+            <a:r>
+              <a:rPr lang="en-US" sz="1200" i="1" dirty="0">
+                <a:solidFill>
+                  <a:srgbClr val="1C2833"/>
+                </a:solidFill>
+                <a:latin typeface="Arial" pitchFamily="34" charset="0"/>
+                <a:ea typeface="Arial" pitchFamily="34" charset="-122"/>
+                <a:cs typeface="Arial" pitchFamily="34" charset="-120"/>
+              </a:rPr>
+              <a:t>Mīna</a:t>
+            </a:r>
+            <a:pPr algn="l" indent="0" marL="0">
+              <a:lnSpc>
+                <a:spcPts val="1620"/>
+              </a:lnSpc>
+              <a:spcAft>
+                <a:spcPts val="300"/>
+              </a:spcAft>
+              <a:buNone/>
+            </a:pPr>
+            <a:r>
+              <a:rPr lang="en-US" sz="1200" dirty="0">
+                <a:solidFill>
+                  <a:srgbClr val="1C2833"/>
+                </a:solidFill>
+                <a:latin typeface="Arial" pitchFamily="34" charset="0"/>
+                <a:ea typeface="Arial" pitchFamily="34" charset="-122"/>
+                <a:cs typeface="Arial" pitchFamily="34" charset="-120"/>
+              </a:rPr>
+              <a:t> · Pisces · Fishes</a:t>
+            </a:r>
+            <a:endParaRPr lang="en-US" sz="1200" dirty="0"/>
+          </a:p>
+        </p:txBody>
+      </p:sp>
+      <p:sp>
+        <p:nvSpPr>
+          <p:cNvPr id="8" name="Text 6"/>
+          <p:cNvSpPr/>
+          <p:nvPr/>
+        </p:nvSpPr>
+        <p:spPr>
+          <a:xfrm>
+            <a:off x="406301" y="5197822"/>
             <a:ext cx="8498026" cy="639812"/>
           </a:xfrm>
           <a:prstGeom prst="rect">
@@ -5694,13 +6812,13 @@
       </p:sp>
       <p:sp>
         <p:nvSpPr>
-          <p:cNvPr id="7" name="Text 5"/>
+          <p:cNvPr id="9" name="Text 7"/>
           <p:cNvSpPr/>
           <p:nvPr/>
         </p:nvSpPr>
         <p:spPr>
           <a:xfrm>
-            <a:off x="634901" y="6107609"/>
+            <a:off x="634901" y="5926485"/>
             <a:ext cx="8102798" cy="281880"/>
           </a:xfrm>
           <a:prstGeom prst="rect">
@@ -5800,13 +6918,13 @@
       </p:sp>
       <p:sp>
         <p:nvSpPr>
-          <p:cNvPr id="8" name="Text 6"/>
+          <p:cNvPr id="10" name="Text 8"/>
           <p:cNvSpPr/>
           <p:nvPr/>
         </p:nvSpPr>
         <p:spPr>
           <a:xfrm>
-            <a:off x="406301" y="10013900"/>
+            <a:off x="406301" y="6297216"/>
             <a:ext cx="8498026" cy="213271"/>
           </a:xfrm>
           <a:prstGeom prst="rect">
@@ -5832,15 +6950,15 @@
               <a:buNone/>
             </a:pPr>
             <a:r>
-              <a:rPr lang="en-US" sz="1200" dirty="0">
-                <a:solidFill>
-                  <a:srgbClr val="1C2833"/>
-                </a:solidFill>
-                <a:latin typeface="Arial" pitchFamily="34" charset="0"/>
-                <a:ea typeface="Arial" pitchFamily="34" charset="-122"/>
-                <a:cs typeface="Arial" pitchFamily="34" charset="-120"/>
-              </a:rPr>
-              <a:t>Each crossing is a </a:t>
+              <a:rPr lang="en-US" sz="1200" i="1" dirty="0">
+                <a:solidFill>
+                  <a:srgbClr val="1C2833"/>
+                </a:solidFill>
+                <a:latin typeface="Arial" pitchFamily="34" charset="0"/>
+                <a:ea typeface="Arial" pitchFamily="34" charset="-122"/>
+                <a:cs typeface="Arial" pitchFamily="34" charset="-120"/>
+              </a:rPr>
+              <a:t>Each row:</a:t>
             </a:r>
             <a:pPr algn="l" indent="0" marL="0">
               <a:lnSpc>
@@ -5855,6 +6973,29 @@
               <a:buNone/>
             </a:pPr>
             <a:r>
+              <a:rPr lang="en-US" sz="1200" dirty="0">
+                <a:solidFill>
+                  <a:srgbClr val="1C2833"/>
+                </a:solidFill>
+                <a:latin typeface="Arial" pitchFamily="34" charset="0"/>
+                <a:ea typeface="Arial" pitchFamily="34" charset="-122"/>
+                <a:cs typeface="Arial" pitchFamily="34" charset="-120"/>
+              </a:rPr>
+              <a:t>Rāśi</a:t>
+            </a:r>
+            <a:pPr algn="l" indent="0" marL="0">
+              <a:lnSpc>
+                <a:spcPts val="1680"/>
+              </a:lnSpc>
+              <a:spcBef>
+                <a:spcPts val="300"/>
+              </a:spcBef>
+              <a:spcAft>
+                <a:spcPts val="300"/>
+              </a:spcAft>
+              <a:buNone/>
+            </a:pPr>
+            <a:r>
               <a:rPr lang="en-US" sz="1200" i="1" dirty="0">
                 <a:solidFill>
                   <a:srgbClr val="1C2833"/>
@@ -5863,30 +7004,7 @@
                 <a:ea typeface="Arial" pitchFamily="34" charset="-122"/>
                 <a:cs typeface="Arial" pitchFamily="34" charset="-120"/>
               </a:rPr>
-              <a:t>saṁkrānti</a:t>
-            </a:r>
-            <a:pPr algn="l" indent="0" marL="0">
-              <a:lnSpc>
-                <a:spcPts val="1680"/>
-              </a:lnSpc>
-              <a:spcBef>
-                <a:spcPts val="300"/>
-              </a:spcBef>
-              <a:spcAft>
-                <a:spcPts val="300"/>
-              </a:spcAft>
-              <a:buNone/>
-            </a:pPr>
-            <a:r>
-              <a:rPr lang="en-US" sz="1200" dirty="0">
-                <a:solidFill>
-                  <a:srgbClr val="1C2833"/>
-                </a:solidFill>
-                <a:latin typeface="Arial" pitchFamily="34" charset="0"/>
-                <a:ea typeface="Arial" pitchFamily="34" charset="-122"/>
-                <a:cs typeface="Arial" pitchFamily="34" charset="-120"/>
-              </a:rPr>
-              <a:t> (Day 6).</a:t>
+              <a:t> · Sun is here approximately.</a:t>
             </a:r>
             <a:endParaRPr lang="en-US" sz="1200" dirty="0"/>
           </a:p>
@@ -5894,13 +7012,657 @@
       </p:sp>
       <p:sp>
         <p:nvSpPr>
-          <p:cNvPr id="9" name="Text 7"/>
+          <p:cNvPr id="11" name="Text 9"/>
           <p:cNvSpPr/>
           <p:nvPr/>
         </p:nvSpPr>
         <p:spPr>
           <a:xfrm>
-            <a:off x="634901" y="10316021"/>
+            <a:off x="634901" y="6599337"/>
+            <a:ext cx="8102798" cy="2963466"/>
+          </a:xfrm>
+          <a:prstGeom prst="rect">
+            <a:avLst/>
+          </a:prstGeom>
+          <a:noFill/>
+          <a:ln/>
+        </p:spPr>
+        <p:txBody>
+          <a:bodyPr wrap="square" lIns="0" tIns="0" rIns="0" bIns="0" rtlCol="0" anchor="t"/>
+          <a:lstStyle/>
+          <a:p>
+            <a:pPr algn="l" marL="342900" indent="-342900">
+              <a:lnSpc>
+                <a:spcPts val="1620"/>
+              </a:lnSpc>
+              <a:spcAft>
+                <a:spcPts val="300"/>
+              </a:spcAft>
+              <a:buSzPct val="100000"/>
+              <a:buChar char="•"/>
+            </a:pPr>
+            <a:r>
+              <a:rPr lang="en-US" sz="1200" i="1" dirty="0">
+                <a:solidFill>
+                  <a:srgbClr val="1C2833"/>
+                </a:solidFill>
+                <a:latin typeface="Arial" pitchFamily="34" charset="0"/>
+                <a:ea typeface="Arial" pitchFamily="34" charset="-122"/>
+                <a:cs typeface="Arial" pitchFamily="34" charset="-120"/>
+              </a:rPr>
+              <a:t>Meṣa</a:t>
+            </a:r>
+            <a:pPr algn="l" indent="0" marL="0">
+              <a:lnSpc>
+                <a:spcPts val="1620"/>
+              </a:lnSpc>
+              <a:spcAft>
+                <a:spcPts val="300"/>
+              </a:spcAft>
+              <a:buNone/>
+            </a:pPr>
+            <a:r>
+              <a:rPr lang="en-US" sz="1200" dirty="0">
+                <a:solidFill>
+                  <a:srgbClr val="1C2833"/>
+                </a:solidFill>
+                <a:latin typeface="Arial" pitchFamily="34" charset="0"/>
+                <a:ea typeface="Arial" pitchFamily="34" charset="-122"/>
+                <a:cs typeface="Arial" pitchFamily="34" charset="-120"/>
+              </a:rPr>
+              <a:t> — 14 Apr → 14 May</a:t>
+            </a:r>
+            <a:endParaRPr lang="en-US" sz="1200" dirty="0"/>
+          </a:p>
+          <a:p>
+            <a:pPr algn="l" marL="342900" indent="-342900">
+              <a:lnSpc>
+                <a:spcPts val="1620"/>
+              </a:lnSpc>
+              <a:spcAft>
+                <a:spcPts val="300"/>
+              </a:spcAft>
+              <a:buSzPct val="100000"/>
+              <a:buChar char="•"/>
+            </a:pPr>
+            <a:r>
+              <a:rPr lang="en-US" sz="1200" i="1" dirty="0">
+                <a:solidFill>
+                  <a:srgbClr val="1C2833"/>
+                </a:solidFill>
+                <a:latin typeface="Arial" pitchFamily="34" charset="0"/>
+                <a:ea typeface="Arial" pitchFamily="34" charset="-122"/>
+                <a:cs typeface="Arial" pitchFamily="34" charset="-120"/>
+              </a:rPr>
+              <a:t>Vṛṣabha</a:t>
+            </a:r>
+            <a:pPr algn="l" indent="0" marL="0">
+              <a:lnSpc>
+                <a:spcPts val="1620"/>
+              </a:lnSpc>
+              <a:spcAft>
+                <a:spcPts val="300"/>
+              </a:spcAft>
+              <a:buNone/>
+            </a:pPr>
+            <a:r>
+              <a:rPr lang="en-US" sz="1200" dirty="0">
+                <a:solidFill>
+                  <a:srgbClr val="1C2833"/>
+                </a:solidFill>
+                <a:latin typeface="Arial" pitchFamily="34" charset="0"/>
+                <a:ea typeface="Arial" pitchFamily="34" charset="-122"/>
+                <a:cs typeface="Arial" pitchFamily="34" charset="-120"/>
+              </a:rPr>
+              <a:t> — 14 May → 14 Jun</a:t>
+            </a:r>
+            <a:endParaRPr lang="en-US" sz="1200" dirty="0"/>
+          </a:p>
+          <a:p>
+            <a:pPr algn="l" marL="342900" indent="-342900">
+              <a:lnSpc>
+                <a:spcPts val="1620"/>
+              </a:lnSpc>
+              <a:spcAft>
+                <a:spcPts val="300"/>
+              </a:spcAft>
+              <a:buSzPct val="100000"/>
+              <a:buChar char="•"/>
+            </a:pPr>
+            <a:r>
+              <a:rPr lang="en-US" sz="1200" i="1" dirty="0">
+                <a:solidFill>
+                  <a:srgbClr val="1C2833"/>
+                </a:solidFill>
+                <a:latin typeface="Arial" pitchFamily="34" charset="0"/>
+                <a:ea typeface="Arial" pitchFamily="34" charset="-122"/>
+                <a:cs typeface="Arial" pitchFamily="34" charset="-120"/>
+              </a:rPr>
+              <a:t>Mithuna</a:t>
+            </a:r>
+            <a:pPr algn="l" indent="0" marL="0">
+              <a:lnSpc>
+                <a:spcPts val="1620"/>
+              </a:lnSpc>
+              <a:spcAft>
+                <a:spcPts val="300"/>
+              </a:spcAft>
+              <a:buNone/>
+            </a:pPr>
+            <a:r>
+              <a:rPr lang="en-US" sz="1200" dirty="0">
+                <a:solidFill>
+                  <a:srgbClr val="1C2833"/>
+                </a:solidFill>
+                <a:latin typeface="Arial" pitchFamily="34" charset="0"/>
+                <a:ea typeface="Arial" pitchFamily="34" charset="-122"/>
+                <a:cs typeface="Arial" pitchFamily="34" charset="-120"/>
+              </a:rPr>
+              <a:t> — 14 Jun → 16 Jul</a:t>
+            </a:r>
+            <a:endParaRPr lang="en-US" sz="1200" dirty="0"/>
+          </a:p>
+          <a:p>
+            <a:pPr algn="l" marL="342900" indent="-342900">
+              <a:lnSpc>
+                <a:spcPts val="1620"/>
+              </a:lnSpc>
+              <a:spcAft>
+                <a:spcPts val="300"/>
+              </a:spcAft>
+              <a:buSzPct val="100000"/>
+              <a:buChar char="•"/>
+            </a:pPr>
+            <a:r>
+              <a:rPr lang="en-US" sz="1200" i="1" dirty="0">
+                <a:solidFill>
+                  <a:srgbClr val="1C2833"/>
+                </a:solidFill>
+                <a:latin typeface="Arial" pitchFamily="34" charset="0"/>
+                <a:ea typeface="Arial" pitchFamily="34" charset="-122"/>
+                <a:cs typeface="Arial" pitchFamily="34" charset="-120"/>
+              </a:rPr>
+              <a:t>Karka</a:t>
+            </a:r>
+            <a:pPr algn="l" indent="0" marL="0">
+              <a:lnSpc>
+                <a:spcPts val="1620"/>
+              </a:lnSpc>
+              <a:spcAft>
+                <a:spcPts val="300"/>
+              </a:spcAft>
+              <a:buNone/>
+            </a:pPr>
+            <a:r>
+              <a:rPr lang="en-US" sz="1200" dirty="0">
+                <a:solidFill>
+                  <a:srgbClr val="1C2833"/>
+                </a:solidFill>
+                <a:latin typeface="Arial" pitchFamily="34" charset="0"/>
+                <a:ea typeface="Arial" pitchFamily="34" charset="-122"/>
+                <a:cs typeface="Arial" pitchFamily="34" charset="-120"/>
+              </a:rPr>
+              <a:t> — 16 Jul → 16 Aug</a:t>
+            </a:r>
+            <a:endParaRPr lang="en-US" sz="1200" dirty="0"/>
+          </a:p>
+          <a:p>
+            <a:pPr algn="l" marL="342900" indent="-342900">
+              <a:lnSpc>
+                <a:spcPts val="1620"/>
+              </a:lnSpc>
+              <a:spcAft>
+                <a:spcPts val="300"/>
+              </a:spcAft>
+              <a:buSzPct val="100000"/>
+              <a:buChar char="•"/>
+            </a:pPr>
+            <a:r>
+              <a:rPr lang="en-US" sz="1200" i="1" dirty="0">
+                <a:solidFill>
+                  <a:srgbClr val="1C2833"/>
+                </a:solidFill>
+                <a:latin typeface="Arial" pitchFamily="34" charset="0"/>
+                <a:ea typeface="Arial" pitchFamily="34" charset="-122"/>
+                <a:cs typeface="Arial" pitchFamily="34" charset="-120"/>
+              </a:rPr>
+              <a:t>Siṁha</a:t>
+            </a:r>
+            <a:pPr algn="l" indent="0" marL="0">
+              <a:lnSpc>
+                <a:spcPts val="1620"/>
+              </a:lnSpc>
+              <a:spcAft>
+                <a:spcPts val="300"/>
+              </a:spcAft>
+              <a:buNone/>
+            </a:pPr>
+            <a:r>
+              <a:rPr lang="en-US" sz="1200" dirty="0">
+                <a:solidFill>
+                  <a:srgbClr val="1C2833"/>
+                </a:solidFill>
+                <a:latin typeface="Arial" pitchFamily="34" charset="0"/>
+                <a:ea typeface="Arial" pitchFamily="34" charset="-122"/>
+                <a:cs typeface="Arial" pitchFamily="34" charset="-120"/>
+              </a:rPr>
+              <a:t> — 16 Aug → 16 Sep</a:t>
+            </a:r>
+            <a:endParaRPr lang="en-US" sz="1200" dirty="0"/>
+          </a:p>
+          <a:p>
+            <a:pPr algn="l" marL="342900" indent="-342900">
+              <a:lnSpc>
+                <a:spcPts val="1620"/>
+              </a:lnSpc>
+              <a:spcAft>
+                <a:spcPts val="300"/>
+              </a:spcAft>
+              <a:buSzPct val="100000"/>
+              <a:buChar char="•"/>
+            </a:pPr>
+            <a:r>
+              <a:rPr lang="en-US" sz="1200" i="1" dirty="0">
+                <a:solidFill>
+                  <a:srgbClr val="1C2833"/>
+                </a:solidFill>
+                <a:latin typeface="Arial" pitchFamily="34" charset="0"/>
+                <a:ea typeface="Arial" pitchFamily="34" charset="-122"/>
+                <a:cs typeface="Arial" pitchFamily="34" charset="-120"/>
+              </a:rPr>
+              <a:t>Kanyā</a:t>
+            </a:r>
+            <a:pPr algn="l" indent="0" marL="0">
+              <a:lnSpc>
+                <a:spcPts val="1620"/>
+              </a:lnSpc>
+              <a:spcAft>
+                <a:spcPts val="300"/>
+              </a:spcAft>
+              <a:buNone/>
+            </a:pPr>
+            <a:r>
+              <a:rPr lang="en-US" sz="1200" dirty="0">
+                <a:solidFill>
+                  <a:srgbClr val="1C2833"/>
+                </a:solidFill>
+                <a:latin typeface="Arial" pitchFamily="34" charset="0"/>
+                <a:ea typeface="Arial" pitchFamily="34" charset="-122"/>
+                <a:cs typeface="Arial" pitchFamily="34" charset="-120"/>
+              </a:rPr>
+              <a:t> — 16 Sep → 17 Oct</a:t>
+            </a:r>
+            <a:endParaRPr lang="en-US" sz="1200" dirty="0"/>
+          </a:p>
+          <a:p>
+            <a:pPr algn="l" marL="342900" indent="-342900">
+              <a:lnSpc>
+                <a:spcPts val="1620"/>
+              </a:lnSpc>
+              <a:spcAft>
+                <a:spcPts val="300"/>
+              </a:spcAft>
+              <a:buSzPct val="100000"/>
+              <a:buChar char="•"/>
+            </a:pPr>
+            <a:r>
+              <a:rPr lang="en-US" sz="1200" i="1" dirty="0">
+                <a:solidFill>
+                  <a:srgbClr val="1C2833"/>
+                </a:solidFill>
+                <a:latin typeface="Arial" pitchFamily="34" charset="0"/>
+                <a:ea typeface="Arial" pitchFamily="34" charset="-122"/>
+                <a:cs typeface="Arial" pitchFamily="34" charset="-120"/>
+              </a:rPr>
+              <a:t>Tulā</a:t>
+            </a:r>
+            <a:pPr algn="l" indent="0" marL="0">
+              <a:lnSpc>
+                <a:spcPts val="1620"/>
+              </a:lnSpc>
+              <a:spcAft>
+                <a:spcPts val="300"/>
+              </a:spcAft>
+              <a:buNone/>
+            </a:pPr>
+            <a:r>
+              <a:rPr lang="en-US" sz="1200" dirty="0">
+                <a:solidFill>
+                  <a:srgbClr val="1C2833"/>
+                </a:solidFill>
+                <a:latin typeface="Arial" pitchFamily="34" charset="0"/>
+                <a:ea typeface="Arial" pitchFamily="34" charset="-122"/>
+                <a:cs typeface="Arial" pitchFamily="34" charset="-120"/>
+              </a:rPr>
+              <a:t> — 17 Oct → 16 Nov</a:t>
+            </a:r>
+            <a:endParaRPr lang="en-US" sz="1200" dirty="0"/>
+          </a:p>
+          <a:p>
+            <a:pPr algn="l" marL="342900" indent="-342900">
+              <a:lnSpc>
+                <a:spcPts val="1620"/>
+              </a:lnSpc>
+              <a:spcAft>
+                <a:spcPts val="300"/>
+              </a:spcAft>
+              <a:buSzPct val="100000"/>
+              <a:buChar char="•"/>
+            </a:pPr>
+            <a:r>
+              <a:rPr lang="en-US" sz="1200" i="1" dirty="0">
+                <a:solidFill>
+                  <a:srgbClr val="1C2833"/>
+                </a:solidFill>
+                <a:latin typeface="Arial" pitchFamily="34" charset="0"/>
+                <a:ea typeface="Arial" pitchFamily="34" charset="-122"/>
+                <a:cs typeface="Arial" pitchFamily="34" charset="-120"/>
+              </a:rPr>
+              <a:t>Vṛścika</a:t>
+            </a:r>
+            <a:pPr algn="l" indent="0" marL="0">
+              <a:lnSpc>
+                <a:spcPts val="1620"/>
+              </a:lnSpc>
+              <a:spcAft>
+                <a:spcPts val="300"/>
+              </a:spcAft>
+              <a:buNone/>
+            </a:pPr>
+            <a:r>
+              <a:rPr lang="en-US" sz="1200" dirty="0">
+                <a:solidFill>
+                  <a:srgbClr val="1C2833"/>
+                </a:solidFill>
+                <a:latin typeface="Arial" pitchFamily="34" charset="0"/>
+                <a:ea typeface="Arial" pitchFamily="34" charset="-122"/>
+                <a:cs typeface="Arial" pitchFamily="34" charset="-120"/>
+              </a:rPr>
+              <a:t> — 16 Nov → 15 Dec</a:t>
+            </a:r>
+            <a:endParaRPr lang="en-US" sz="1200" dirty="0"/>
+          </a:p>
+          <a:p>
+            <a:pPr algn="l" marL="342900" indent="-342900">
+              <a:lnSpc>
+                <a:spcPts val="1620"/>
+              </a:lnSpc>
+              <a:spcAft>
+                <a:spcPts val="300"/>
+              </a:spcAft>
+              <a:buSzPct val="100000"/>
+              <a:buChar char="•"/>
+            </a:pPr>
+            <a:r>
+              <a:rPr lang="en-US" sz="1200" i="1" dirty="0">
+                <a:solidFill>
+                  <a:srgbClr val="1C2833"/>
+                </a:solidFill>
+                <a:latin typeface="Arial" pitchFamily="34" charset="0"/>
+                <a:ea typeface="Arial" pitchFamily="34" charset="-122"/>
+                <a:cs typeface="Arial" pitchFamily="34" charset="-120"/>
+              </a:rPr>
+              <a:t>Dhanus</a:t>
+            </a:r>
+            <a:pPr algn="l" indent="0" marL="0">
+              <a:lnSpc>
+                <a:spcPts val="1620"/>
+              </a:lnSpc>
+              <a:spcAft>
+                <a:spcPts val="300"/>
+              </a:spcAft>
+              <a:buNone/>
+            </a:pPr>
+            <a:r>
+              <a:rPr lang="en-US" sz="1200" dirty="0">
+                <a:solidFill>
+                  <a:srgbClr val="1C2833"/>
+                </a:solidFill>
+                <a:latin typeface="Arial" pitchFamily="34" charset="0"/>
+                <a:ea typeface="Arial" pitchFamily="34" charset="-122"/>
+                <a:cs typeface="Arial" pitchFamily="34" charset="-120"/>
+              </a:rPr>
+              <a:t> — 15 Dec → 14 Jan</a:t>
+            </a:r>
+            <a:endParaRPr lang="en-US" sz="1200" dirty="0"/>
+          </a:p>
+          <a:p>
+            <a:pPr algn="l" marL="342900" indent="-342900">
+              <a:lnSpc>
+                <a:spcPts val="1620"/>
+              </a:lnSpc>
+              <a:spcAft>
+                <a:spcPts val="300"/>
+              </a:spcAft>
+              <a:buSzPct val="100000"/>
+              <a:buChar char="•"/>
+            </a:pPr>
+            <a:r>
+              <a:rPr lang="en-US" sz="1200" i="1" dirty="0">
+                <a:solidFill>
+                  <a:srgbClr val="1C2833"/>
+                </a:solidFill>
+                <a:latin typeface="Arial" pitchFamily="34" charset="0"/>
+                <a:ea typeface="Arial" pitchFamily="34" charset="-122"/>
+                <a:cs typeface="Arial" pitchFamily="34" charset="-120"/>
+              </a:rPr>
+              <a:t>Makara</a:t>
+            </a:r>
+            <a:pPr algn="l" indent="0" marL="0">
+              <a:lnSpc>
+                <a:spcPts val="1620"/>
+              </a:lnSpc>
+              <a:spcAft>
+                <a:spcPts val="300"/>
+              </a:spcAft>
+              <a:buNone/>
+            </a:pPr>
+            <a:r>
+              <a:rPr lang="en-US" sz="1200" dirty="0">
+                <a:solidFill>
+                  <a:srgbClr val="1C2833"/>
+                </a:solidFill>
+                <a:latin typeface="Arial" pitchFamily="34" charset="0"/>
+                <a:ea typeface="Arial" pitchFamily="34" charset="-122"/>
+                <a:cs typeface="Arial" pitchFamily="34" charset="-120"/>
+              </a:rPr>
+              <a:t> — 14 Jan → 13 Feb</a:t>
+            </a:r>
+            <a:endParaRPr lang="en-US" sz="1200" dirty="0"/>
+          </a:p>
+          <a:p>
+            <a:pPr algn="l" marL="342900" indent="-342900">
+              <a:lnSpc>
+                <a:spcPts val="1620"/>
+              </a:lnSpc>
+              <a:spcAft>
+                <a:spcPts val="300"/>
+              </a:spcAft>
+              <a:buSzPct val="100000"/>
+              <a:buChar char="•"/>
+            </a:pPr>
+            <a:r>
+              <a:rPr lang="en-US" sz="1200" i="1" dirty="0">
+                <a:solidFill>
+                  <a:srgbClr val="1C2833"/>
+                </a:solidFill>
+                <a:latin typeface="Arial" pitchFamily="34" charset="0"/>
+                <a:ea typeface="Arial" pitchFamily="34" charset="-122"/>
+                <a:cs typeface="Arial" pitchFamily="34" charset="-120"/>
+              </a:rPr>
+              <a:t>Kumbha</a:t>
+            </a:r>
+            <a:pPr algn="l" indent="0" marL="0">
+              <a:lnSpc>
+                <a:spcPts val="1620"/>
+              </a:lnSpc>
+              <a:spcAft>
+                <a:spcPts val="300"/>
+              </a:spcAft>
+              <a:buNone/>
+            </a:pPr>
+            <a:r>
+              <a:rPr lang="en-US" sz="1200" dirty="0">
+                <a:solidFill>
+                  <a:srgbClr val="1C2833"/>
+                </a:solidFill>
+                <a:latin typeface="Arial" pitchFamily="34" charset="0"/>
+                <a:ea typeface="Arial" pitchFamily="34" charset="-122"/>
+                <a:cs typeface="Arial" pitchFamily="34" charset="-120"/>
+              </a:rPr>
+              <a:t> — 13 Feb → 14 Mar</a:t>
+            </a:r>
+            <a:endParaRPr lang="en-US" sz="1200" dirty="0"/>
+          </a:p>
+          <a:p>
+            <a:pPr algn="l" marL="342900" indent="-342900">
+              <a:lnSpc>
+                <a:spcPts val="1620"/>
+              </a:lnSpc>
+              <a:spcAft>
+                <a:spcPts val="300"/>
+              </a:spcAft>
+              <a:buSzPct val="100000"/>
+              <a:buChar char="•"/>
+            </a:pPr>
+            <a:r>
+              <a:rPr lang="en-US" sz="1200" i="1" dirty="0">
+                <a:solidFill>
+                  <a:srgbClr val="1C2833"/>
+                </a:solidFill>
+                <a:latin typeface="Arial" pitchFamily="34" charset="0"/>
+                <a:ea typeface="Arial" pitchFamily="34" charset="-122"/>
+                <a:cs typeface="Arial" pitchFamily="34" charset="-120"/>
+              </a:rPr>
+              <a:t>Mīna</a:t>
+            </a:r>
+            <a:pPr algn="l" indent="0" marL="0">
+              <a:lnSpc>
+                <a:spcPts val="1620"/>
+              </a:lnSpc>
+              <a:spcAft>
+                <a:spcPts val="300"/>
+              </a:spcAft>
+              <a:buNone/>
+            </a:pPr>
+            <a:r>
+              <a:rPr lang="en-US" sz="1200" dirty="0">
+                <a:solidFill>
+                  <a:srgbClr val="1C2833"/>
+                </a:solidFill>
+                <a:latin typeface="Arial" pitchFamily="34" charset="0"/>
+                <a:ea typeface="Arial" pitchFamily="34" charset="-122"/>
+                <a:cs typeface="Arial" pitchFamily="34" charset="-120"/>
+              </a:rPr>
+              <a:t> — 14 Mar → 14 Apr</a:t>
+            </a:r>
+            <a:endParaRPr lang="en-US" sz="1200" dirty="0"/>
+          </a:p>
+        </p:txBody>
+      </p:sp>
+      <p:sp>
+        <p:nvSpPr>
+          <p:cNvPr id="12" name="Text 10"/>
+          <p:cNvSpPr/>
+          <p:nvPr/>
+        </p:nvSpPr>
+        <p:spPr>
+          <a:xfrm>
+            <a:off x="406301" y="9651653"/>
+            <a:ext cx="8498026" cy="213271"/>
+          </a:xfrm>
+          <a:prstGeom prst="rect">
+            <a:avLst/>
+          </a:prstGeom>
+          <a:noFill/>
+          <a:ln/>
+        </p:spPr>
+        <p:txBody>
+          <a:bodyPr wrap="square" lIns="0" tIns="0" rIns="0" bIns="0" rtlCol="0" anchor="t"/>
+          <a:lstStyle/>
+          <a:p>
+            <a:pPr algn="l" indent="0" marL="0">
+              <a:lnSpc>
+                <a:spcPts val="1680"/>
+              </a:lnSpc>
+              <a:spcBef>
+                <a:spcPts val="300"/>
+              </a:spcBef>
+              <a:spcAft>
+                <a:spcPts val="300"/>
+              </a:spcAft>
+              <a:buNone/>
+            </a:pPr>
+            <a:r>
+              <a:rPr lang="en-US" sz="1200" dirty="0">
+                <a:solidFill>
+                  <a:srgbClr val="1C2833"/>
+                </a:solidFill>
+                <a:latin typeface="Arial" pitchFamily="34" charset="0"/>
+                <a:ea typeface="Arial" pitchFamily="34" charset="-122"/>
+                <a:cs typeface="Arial" pitchFamily="34" charset="-120"/>
+              </a:rPr>
+              <a:t>Each crossing is a </a:t>
+            </a:r>
+            <a:pPr algn="l" indent="0" marL="0">
+              <a:lnSpc>
+                <a:spcPts val="1680"/>
+              </a:lnSpc>
+              <a:spcBef>
+                <a:spcPts val="300"/>
+              </a:spcBef>
+              <a:spcAft>
+                <a:spcPts val="300"/>
+              </a:spcAft>
+              <a:buNone/>
+            </a:pPr>
+            <a:r>
+              <a:rPr lang="en-US" sz="1200" i="1" dirty="0">
+                <a:solidFill>
+                  <a:srgbClr val="1C2833"/>
+                </a:solidFill>
+                <a:latin typeface="Arial" pitchFamily="34" charset="0"/>
+                <a:ea typeface="Arial" pitchFamily="34" charset="-122"/>
+                <a:cs typeface="Arial" pitchFamily="34" charset="-120"/>
+              </a:rPr>
+              <a:t>saṁkrānti</a:t>
+            </a:r>
+            <a:pPr algn="l" indent="0" marL="0">
+              <a:lnSpc>
+                <a:spcPts val="1680"/>
+              </a:lnSpc>
+              <a:spcBef>
+                <a:spcPts val="300"/>
+              </a:spcBef>
+              <a:spcAft>
+                <a:spcPts val="300"/>
+              </a:spcAft>
+              <a:buNone/>
+            </a:pPr>
+            <a:r>
+              <a:rPr lang="en-US" sz="1200" dirty="0">
+                <a:solidFill>
+                  <a:srgbClr val="1C2833"/>
+                </a:solidFill>
+                <a:latin typeface="Arial" pitchFamily="34" charset="0"/>
+                <a:ea typeface="Arial" pitchFamily="34" charset="-122"/>
+                <a:cs typeface="Arial" pitchFamily="34" charset="-120"/>
+              </a:rPr>
+              <a:t> (Day 6).</a:t>
+            </a:r>
+            <a:endParaRPr lang="en-US" sz="1200" dirty="0"/>
+          </a:p>
+        </p:txBody>
+      </p:sp>
+      <p:sp>
+        <p:nvSpPr>
+          <p:cNvPr id="13" name="Text 11"/>
+          <p:cNvSpPr/>
+          <p:nvPr/>
+        </p:nvSpPr>
+        <p:spPr>
+          <a:xfrm>
+            <a:off x="634901" y="9953774"/>
             <a:ext cx="8102798" cy="281880"/>
           </a:xfrm>
           <a:prstGeom prst="rect">
@@ -5960,13 +7722,13 @@
       </p:sp>
       <p:sp>
         <p:nvSpPr>
-          <p:cNvPr id="10" name="Text 8"/>
+          <p:cNvPr id="14" name="Text 12"/>
           <p:cNvSpPr/>
           <p:nvPr/>
         </p:nvSpPr>
         <p:spPr>
           <a:xfrm>
-            <a:off x="406301" y="10686752"/>
+            <a:off x="406301" y="10324505"/>
             <a:ext cx="8498026" cy="649337"/>
           </a:xfrm>
           <a:prstGeom prst="rect">
@@ -6146,13 +7908,13 @@
       </p:sp>
       <p:sp>
         <p:nvSpPr>
-          <p:cNvPr id="11" name="Text 9"/>
+          <p:cNvPr id="15" name="Text 13"/>
           <p:cNvSpPr/>
           <p:nvPr/>
         </p:nvSpPr>
         <p:spPr>
           <a:xfrm>
-            <a:off x="406301" y="11488489"/>
+            <a:off x="406301" y="11126242"/>
             <a:ext cx="8498026" cy="213271"/>
           </a:xfrm>
           <a:prstGeom prst="rect">
